--- a/Planning docs/Slides/lesson-7-1-teacher-slides.pptx
+++ b/Planning docs/Slides/lesson-7-1-teacher-slides.pptx
@@ -516,7 +516,7 @@
           <a:p>
             <a:r>
               <a:rPr lang="en-US" dirty="0"/>
-              <a:t>Lesson 7.1. Reading: 📰 Read: Text Features Help Readers.</a:t>
+              <a:t>Lesson 7.1. Reading: Text Features Help Readers.</a:t>
             </a:r>
             <a:endParaRPr lang="en-US" dirty="0"/>
           </a:p>
@@ -2231,7 +2231,7 @@
                 <a:ea typeface="Calibri" pitchFamily="34" charset="-122"/>
                 <a:cs typeface="Calibri" pitchFamily="34" charset="-120"/>
               </a:rPr>
-              <a:t>Lesson 7.1  ·  📰 Read: Text Features Help Readers</a:t>
+              <a:t>Lesson 7.1  ·  Text Features Help Readers</a:t>
             </a:r>
             <a:endParaRPr lang="en-US" sz="2000" dirty="0"/>
           </a:p>
@@ -4623,7 +4623,7 @@
                 <a:ea typeface="Calibri" pitchFamily="34" charset="-122"/>
                 <a:cs typeface="Calibri" pitchFamily="34" charset="-120"/>
               </a:rPr>
-              <a:t>📰 Read: Text Features Help Readers</a:t>
+              <a:t>Text Features Help Readers</a:t>
             </a:r>
             <a:endParaRPr lang="en-US" sz="2600" dirty="0"/>
           </a:p>
@@ -4813,24 +4813,7 @@
                 <a:ea typeface="Calibri" pitchFamily="34" charset="-122"/>
                 <a:cs typeface="Calibri" pitchFamily="34" charset="-120"/>
               </a:rPr>
-              <a:t>•  Before you read the words, what does a nonfiction book teach you just by how it looks?</a:t>
-            </a:r>
-            <a:endParaRPr lang="en-US" sz="1500" dirty="0"/>
-          </a:p>
-          <a:p>
-            <a:pPr indent="0" marL="0">
-              <a:buNone/>
-            </a:pPr>
-            <a:r>
-              <a:rPr lang="en-US" sz="1500" dirty="0">
-                <a:solidFill>
-                  <a:srgbClr val="1E293B"/>
-                </a:solidFill>
-                <a:latin typeface="Calibri" pitchFamily="34" charset="0"/>
-                <a:ea typeface="Calibri" pitchFamily="34" charset="-122"/>
-                <a:cs typeface="Calibri" pitchFamily="34" charset="-120"/>
-              </a:rPr>
-              <a:t>•  The text says good readers use text features on purpose — before, during, and after reading. Which text feature do YOU use most? Which have you never tried?</a:t>
+              <a:t>•  Stop after the article explains what a diagram is. You have just read about six text features. Now look at this page : name one text feature this lesson uses on you, and say what it helps you do.</a:t>
             </a:r>
             <a:endParaRPr lang="en-US" sz="1500" dirty="0"/>
           </a:p>
@@ -5986,7 +5969,7 @@
                 <a:ea typeface="Calibri" pitchFamily="34" charset="-122"/>
                 <a:cs typeface="Calibri" pitchFamily="34" charset="-120"/>
               </a:rPr>
-              <a:t>📰 Read: Text Features Help Readers</a:t>
+              <a:t>Text Features Help Readers</a:t>
             </a:r>
             <a:endParaRPr lang="en-US" sz="2000" dirty="0"/>
           </a:p>
